--- a/docs/presentation/final-presentation.pptx
+++ b/docs/presentation/final-presentation.pptx
@@ -4819,6 +4819,10 @@
           </a:solidFill>
           <a:ln/>
         </p:spPr>
+        <p:txBody>
+          <a:bodyPr/>
+          <a:p/>
+        </p:txBody>
       </p:sp>
       <p:sp>
         <p:nvSpPr>
@@ -4839,6 +4843,10 @@
           </a:solidFill>
           <a:ln/>
         </p:spPr>
+        <p:txBody>
+          <a:bodyPr/>
+          <a:p/>
+        </p:txBody>
       </p:sp>
       <p:sp>
         <p:nvSpPr>
@@ -4859,6 +4867,10 @@
           </a:solidFill>
           <a:ln/>
         </p:spPr>
+        <p:txBody>
+          <a:bodyPr/>
+          <a:p/>
+        </p:txBody>
       </p:sp>
       <p:sp>
         <p:nvSpPr>
@@ -4879,6 +4891,10 @@
           </a:solidFill>
           <a:ln/>
         </p:spPr>
+        <p:txBody>
+          <a:bodyPr/>
+          <a:p/>
+        </p:txBody>
       </p:sp>
       <p:sp>
         <p:nvSpPr>
@@ -5126,6 +5142,10 @@
           </a:solidFill>
           <a:ln/>
         </p:spPr>
+        <p:txBody>
+          <a:bodyPr/>
+          <a:p/>
+        </p:txBody>
       </p:sp>
       <p:sp>
         <p:nvSpPr>
@@ -6093,6 +6113,10 @@
           </a:solidFill>
           <a:ln/>
         </p:spPr>
+        <p:txBody>
+          <a:bodyPr/>
+          <a:p/>
+        </p:txBody>
       </p:sp>
       <p:sp>
         <p:nvSpPr>
@@ -6217,6 +6241,10 @@
           </a:solidFill>
           <a:ln/>
         </p:spPr>
+        <p:txBody>
+          <a:bodyPr/>
+          <a:p/>
+        </p:txBody>
       </p:sp>
       <p:sp>
         <p:nvSpPr>
@@ -6609,6 +6637,10 @@
           </a:solidFill>
           <a:ln/>
         </p:spPr>
+        <p:txBody>
+          <a:bodyPr/>
+          <a:p/>
+        </p:txBody>
       </p:sp>
       <p:sp>
         <p:nvSpPr>
@@ -8080,6 +8112,10 @@
           </a:solidFill>
           <a:ln/>
         </p:spPr>
+        <p:txBody>
+          <a:bodyPr/>
+          <a:p/>
+        </p:txBody>
       </p:sp>
       <p:sp>
         <p:nvSpPr>
@@ -8819,6 +8855,10 @@
           </a:solidFill>
           <a:ln/>
         </p:spPr>
+        <p:txBody>
+          <a:bodyPr/>
+          <a:p/>
+        </p:txBody>
       </p:sp>
       <p:sp>
         <p:nvSpPr>
@@ -8839,6 +8879,10 @@
           </a:solidFill>
           <a:ln/>
         </p:spPr>
+        <p:txBody>
+          <a:bodyPr/>
+          <a:p/>
+        </p:txBody>
       </p:sp>
       <p:sp>
         <p:nvSpPr>
@@ -8859,6 +8903,10 @@
           </a:solidFill>
           <a:ln/>
         </p:spPr>
+        <p:txBody>
+          <a:bodyPr/>
+          <a:p/>
+        </p:txBody>
       </p:sp>
       <p:sp>
         <p:nvSpPr>
@@ -8879,6 +8927,10 @@
           </a:solidFill>
           <a:ln/>
         </p:spPr>
+        <p:txBody>
+          <a:bodyPr/>
+          <a:p/>
+        </p:txBody>
       </p:sp>
       <p:sp>
         <p:nvSpPr>
@@ -9267,7 +9319,7 @@
                             <a:schemeClr val="tx1"/>
                           </a:solidFill>
                         </a:rPr>
-                        <a:t>12:14 ~ 00:14 진행 중</a:t>
+                        <a:t>통과 (19.7시간, 실패 0)</a:t>
                       </a:r>
                       <a:endParaRPr lang="en-US" sz="1500" dirty="0"/>
                     </a:p>
@@ -11149,6 +11201,10 @@
           </a:solidFill>
           <a:ln/>
         </p:spPr>
+        <p:txBody>
+          <a:bodyPr/>
+          <a:p/>
+        </p:txBody>
       </p:sp>
       <p:sp>
         <p:nvSpPr>
@@ -11957,7 +12013,7 @@
                             <a:schemeClr val="tx1"/>
                           </a:solidFill>
                         </a:rPr>
-                        <a:t>69% · 0회</a:t>
+                        <a:t>79%(새 고장) · 69% · 0회</a:t>
                       </a:r>
                       <a:endParaRPr lang="en-US" sz="1500" dirty="0"/>
                     </a:p>
@@ -12605,7 +12661,7 @@
                             <a:schemeClr val="tx1"/>
                           </a:solidFill>
                         </a:rPr>
-                        <a:t>12:14부터 가동 · API·문서 완료</a:t>
+                        <a:t>19.7시간 무중단(1182/1182) · API·문서 완료</a:t>
                       </a:r>
                       <a:endParaRPr lang="en-US" sz="1500" dirty="0"/>
                     </a:p>
@@ -12645,7 +12701,7 @@
                             <a:schemeClr val="tx1"/>
                           </a:solidFill>
                         </a:rPr>
-                        <a:t>진행 중</a:t>
+                        <a:t>정지 시험 남음</a:t>
                       </a:r>
                       <a:endParaRPr lang="en-US" sz="1500" dirty="0"/>
                     </a:p>
@@ -12885,6 +12941,10 @@
           </a:solidFill>
           <a:ln/>
         </p:spPr>
+        <p:txBody>
+          <a:bodyPr/>
+          <a:p/>
+        </p:txBody>
       </p:sp>
       <p:sp>
         <p:nvSpPr>
@@ -13029,6 +13089,10 @@
           </a:solidFill>
           <a:ln/>
         </p:spPr>
+        <p:txBody>
+          <a:bodyPr/>
+          <a:p/>
+        </p:txBody>
       </p:sp>
       <p:sp>
         <p:nvSpPr>
@@ -13173,6 +13237,10 @@
           </a:solidFill>
           <a:ln/>
         </p:spPr>
+        <p:txBody>
+          <a:bodyPr/>
+          <a:p/>
+        </p:txBody>
       </p:sp>
       <p:sp>
         <p:nvSpPr>
@@ -14045,6 +14113,10 @@
           </a:solidFill>
           <a:ln/>
         </p:spPr>
+        <p:txBody>
+          <a:bodyPr/>
+          <a:p/>
+        </p:txBody>
       </p:sp>
       <p:sp>
         <p:nvSpPr>
@@ -15146,6 +15218,10 @@
           </a:solidFill>
           <a:ln/>
         </p:spPr>
+        <p:txBody>
+          <a:bodyPr/>
+          <a:p/>
+        </p:txBody>
       </p:sp>
       <p:sp>
         <p:nvSpPr>
@@ -15630,6 +15706,10 @@
           </a:solidFill>
           <a:ln/>
         </p:spPr>
+        <p:txBody>
+          <a:bodyPr/>
+          <a:p/>
+        </p:txBody>
       </p:sp>
       <p:sp>
         <p:nvSpPr>
@@ -15992,6 +16072,10 @@
           </a:solidFill>
           <a:ln/>
         </p:spPr>
+        <p:txBody>
+          <a:bodyPr/>
+          <a:p/>
+        </p:txBody>
       </p:sp>
       <p:sp>
         <p:nvSpPr>
